--- a/classes/parte-1-machine-learning-clasico/063-metricas-confusion-matrix-precision-recall-f1/clase-063-metricas-confusion-matrix-precision-recall-f1-presentacion.pptx
+++ b/classes/parte-1-machine-learning-clasico/063-metricas-confusion-matrix-precision-recall-f1/clase-063-metricas-confusion-matrix-precision-recall-f1-presentacion.pptx
@@ -4889,7 +4889,7 @@
                 </a:solidFill>
                 <a:latin typeface="Segoe UI"/>
               </a:rPr>
-              <a:t>Primer bloque ejecutable del notebook.</a:t>
+              <a:t>Dejamos de mirar la accuracy como métrica única. Aprendemos a leer una matriz de confusión, a elegir entre precision, recall, F1 y F-beta según el costo de los errores, y a interpretar classification_report. Requiere: numpy, scikit-learn, matplotlib.</a:t>
             </a:r>
           </a:p>
         </p:txBody>
@@ -4976,7 +4976,178 @@
                 </a:solidFill>
                 <a:latin typeface="Courier New"/>
               </a:rPr>
-              <a:t># Imports y configuración inicial</a:t>
+              <a:t>import numpy as np</a:t>
+            </a:r>
+          </a:p>
+          <a:p>
+            <a:pPr>
+              <a:defRPr sz="1200" b="0">
+                <a:solidFill>
+                  <a:srgbClr val="F8FAFC"/>
+                </a:solidFill>
+                <a:latin typeface="Courier New"/>
+              </a:defRPr>
+            </a:pPr>
+            <a:r>
+              <a:rPr sz="1200" b="0">
+                <a:solidFill>
+                  <a:srgbClr val="F8FAFC"/>
+                </a:solidFill>
+                <a:latin typeface="Courier New"/>
+              </a:rPr>
+              <a:t>import matplotlib.pyplot as plt</a:t>
+            </a:r>
+          </a:p>
+          <a:p>
+            <a:pPr>
+              <a:defRPr sz="1200" b="0">
+                <a:solidFill>
+                  <a:srgbClr val="F8FAFC"/>
+                </a:solidFill>
+                <a:latin typeface="Courier New"/>
+              </a:defRPr>
+            </a:pPr>
+            <a:r>
+              <a:rPr sz="1200" b="0">
+                <a:solidFill>
+                  <a:srgbClr val="F8FAFC"/>
+                </a:solidFill>
+                <a:latin typeface="Courier New"/>
+              </a:rPr>
+              <a:t>from sklearn.metrics import (confusion_matrix, precision_score, recall_score,</a:t>
+            </a:r>
+          </a:p>
+          <a:p>
+            <a:pPr>
+              <a:defRPr sz="1200" b="0">
+                <a:solidFill>
+                  <a:srgbClr val="F8FAFC"/>
+                </a:solidFill>
+                <a:latin typeface="Courier New"/>
+              </a:defRPr>
+            </a:pPr>
+            <a:r>
+              <a:rPr sz="1200" b="0">
+                <a:solidFill>
+                  <a:srgbClr val="F8FAFC"/>
+                </a:solidFill>
+                <a:latin typeface="Courier New"/>
+              </a:rPr>
+              <a:t>                             f1_score, fbeta_score, classification_report,</a:t>
+            </a:r>
+          </a:p>
+          <a:p>
+            <a:pPr>
+              <a:defRPr sz="1200" b="0">
+                <a:solidFill>
+                  <a:srgbClr val="F8FAFC"/>
+                </a:solidFill>
+                <a:latin typeface="Courier New"/>
+              </a:defRPr>
+            </a:pPr>
+            <a:r>
+              <a:rPr sz="1200" b="0">
+                <a:solidFill>
+                  <a:srgbClr val="F8FAFC"/>
+                </a:solidFill>
+                <a:latin typeface="Courier New"/>
+              </a:rPr>
+              <a:t>                             ConfusionMatrixDisplay)</a:t>
+            </a:r>
+          </a:p>
+          <a:p>
+            <a:pPr>
+              <a:defRPr sz="1200" b="0">
+                <a:solidFill>
+                  <a:srgbClr val="F8FAFC"/>
+                </a:solidFill>
+                <a:latin typeface="Courier New"/>
+              </a:defRPr>
+            </a:pPr>
+            <a:r>
+              <a:rPr sz="1200" b="0">
+                <a:solidFill>
+                  <a:srgbClr val="F8FAFC"/>
+                </a:solidFill>
+                <a:latin typeface="Courier New"/>
+              </a:rPr>
+              <a:t>from sklearn.datasets import load_digits, make_classification</a:t>
+            </a:r>
+          </a:p>
+          <a:p>
+            <a:pPr>
+              <a:defRPr sz="1200" b="0">
+                <a:solidFill>
+                  <a:srgbClr val="F8FAFC"/>
+                </a:solidFill>
+                <a:latin typeface="Courier New"/>
+              </a:defRPr>
+            </a:pPr>
+            <a:r>
+              <a:rPr sz="1200" b="0">
+                <a:solidFill>
+                  <a:srgbClr val="F8FAFC"/>
+                </a:solidFill>
+                <a:latin typeface="Courier New"/>
+              </a:rPr>
+              <a:t>from sklearn.linear_model import SGDClassifier, LogisticRegression</a:t>
+            </a:r>
+          </a:p>
+          <a:p>
+            <a:pPr>
+              <a:defRPr sz="1200" b="0">
+                <a:solidFill>
+                  <a:srgbClr val="F8FAFC"/>
+                </a:solidFill>
+                <a:latin typeface="Courier New"/>
+              </a:defRPr>
+            </a:pPr>
+            <a:r>
+              <a:rPr sz="1200" b="0">
+                <a:solidFill>
+                  <a:srgbClr val="F8FAFC"/>
+                </a:solidFill>
+                <a:latin typeface="Courier New"/>
+              </a:rPr>
+              <a:t>from sklearn.model_selection import train_test_split</a:t>
+            </a:r>
+          </a:p>
+          <a:p>
+            <a:pPr>
+              <a:defRPr sz="1200" b="0">
+                <a:solidFill>
+                  <a:srgbClr val="F8FAFC"/>
+                </a:solidFill>
+                <a:latin typeface="Courier New"/>
+              </a:defRPr>
+            </a:pPr>
+            <a:r>
+              <a:rPr sz="1200" b="0">
+                <a:solidFill>
+                  <a:srgbClr val="F8FAFC"/>
+                </a:solidFill>
+                <a:latin typeface="Courier New"/>
+              </a:rPr>
+              <a:t> </a:t>
+            </a:r>
+          </a:p>
+          <a:p>
+            <a:pPr>
+              <a:defRPr sz="1200" b="0">
+                <a:solidFill>
+                  <a:srgbClr val="F8FAFC"/>
+                </a:solidFill>
+                <a:latin typeface="Courier New"/>
+              </a:defRPr>
+            </a:pPr>
+            <a:r>
+              <a:rPr sz="1200" b="0">
+                <a:solidFill>
+                  <a:srgbClr val="F8FAFC"/>
+                </a:solidFill>
+                <a:latin typeface="Courier New"/>
+              </a:rPr>
+              <a:t>np.random.seed(42)</a:t>
             </a:r>
           </a:p>
         </p:txBody>

--- a/classes/parte-1-machine-learning-clasico/063-metricas-confusion-matrix-precision-recall-f1/clase-063-metricas-confusion-matrix-precision-recall-f1-presentacion.pptx
+++ b/classes/parte-1-machine-learning-clasico/063-metricas-confusion-matrix-precision-recall-f1/clase-063-metricas-confusion-matrix-precision-recall-f1-presentacion.pptx
@@ -3272,7 +3272,7 @@
                 </a:solidFill>
                 <a:latin typeface="Segoe UI"/>
               </a:rPr>
-              <a:t>Parte: 1 — Machine Learning Clásico · Fuente: Géron, cap. 3.  Duración estimada: 70 min.</a:t>
+              <a:t>Parte: 1 — Machine Learning Clásico · Fuente: Géron, cap. 3.  Duración estimada: 70 min. · Nivel: Intermedio</a:t>
             </a:r>
           </a:p>
         </p:txBody>
@@ -3581,7 +3581,7 @@
                 </a:solidFill>
                 <a:latin typeface="Segoe UI"/>
               </a:rPr>
-              <a:t>Parte: 1 — Machine Learning Clásico · Fuente: Géron, cap. 3.  Duración estimada: 70 min.</a:t>
+              <a:t>Parte: 1 — Machine Learning Clásico · Fuente: Géron, cap. 3.  Duración estimada: 70 min. · Nivel: Intermedio</a:t>
             </a:r>
           </a:p>
         </p:txBody>
